--- a/decks/HCLS-Agentic-AI-Suite-Executive-Overview.pptx
+++ b/decks/HCLS-Agentic-AI-Suite-Executive-Overview.pptx
@@ -12042,28 +12042,28 @@
         <a:sysClr val="window" lastClr="FFFFFF"/>
       </a:lt1>
       <a:dk2>
-        <a:srgbClr val="44546A"/>
+        <a:srgbClr val="232F3E"/>
       </a:dk2>
       <a:lt2>
         <a:srgbClr val="E7E6E6"/>
       </a:lt2>
       <a:accent1>
-        <a:srgbClr val="4472C4"/>
+        <a:srgbClr val="FF9900"/>
       </a:accent1>
       <a:accent2>
-        <a:srgbClr val="ED7D31"/>
+        <a:srgbClr val="232F3E"/>
       </a:accent2>
       <a:accent3>
-        <a:srgbClr val="A5A5A5"/>
+        <a:srgbClr val="01A88D"/>
       </a:accent3>
       <a:accent4>
-        <a:srgbClr val="FFC000"/>
+        <a:srgbClr val="8C4FFF"/>
       </a:accent4>
       <a:accent5>
-        <a:srgbClr val="5B9BD5"/>
+        <a:srgbClr val="DD344C"/>
       </a:accent5>
       <a:accent6>
-        <a:srgbClr val="70AD47"/>
+        <a:srgbClr val="ED7100"/>
       </a:accent6>
       <a:hlink>
         <a:srgbClr val="0563C1"/>
@@ -12074,7 +12074,7 @@
     </a:clrScheme>
     <a:fontScheme name="Office">
       <a:majorFont>
-        <a:latin typeface="Calibri Light" panose="020F0302020204030204"/>
+        <a:latin typeface="Amazon Ember" panose="020F0302020204030204"/>
         <a:ea typeface=""/>
         <a:cs typeface=""/>
         <a:font script="Jpan" typeface="游ゴシック Light"/>
@@ -12126,7 +12126,7 @@
         <a:font script="Tfng" typeface="Ebrima"/>
       </a:majorFont>
       <a:minorFont>
-        <a:latin typeface="Calibri" panose="020F0502020204030204"/>
+        <a:latin typeface="Amazon Ember" panose="020F0502020204030204"/>
         <a:ea typeface=""/>
         <a:cs typeface=""/>
         <a:font script="Jpan" typeface="游ゴシック"/>

--- a/decks/HCLS-Agentic-AI-Suite-Executive-Overview.pptx
+++ b/decks/HCLS-Agentic-AI-Suite-Executive-Overview.pptx
@@ -16,6 +16,8 @@
     <p:sldId id="264" r:id="rId10"/>
     <p:sldId id="265" r:id="rId11"/>
     <p:sldId id="266" r:id="rId12"/>
+    <p:sldId id="267" r:id="rId18"/>
+    <p:sldId id="268" r:id="rId19"/>
   </p:sldIdLst>
   <p:notesMasterIdLst>
     <p:notesMasterId r:id="rId13"/>
@@ -1784,6 +1786,10 @@
           </a:solidFill>
           <a:ln/>
         </p:spPr>
+        <p:txBody>
+          <a:bodyPr/>
+          <a:p/>
+        </p:txBody>
       </p:sp>
       <p:sp>
         <p:nvSpPr>
@@ -1938,6 +1944,39 @@
               <a:t>Executive Overview  ·  Built on AWS  ·  June 2026</a:t>
             </a:r>
             <a:endParaRPr lang="en-US" sz="1200" dirty="0"/>
+          </a:p>
+        </p:txBody>
+      </p:sp>
+      <p:sp>
+        <p:nvSpPr>
+          <p:cNvPr id="7" name="TextBox 6"/>
+          <p:cNvSpPr txBox="1"/>
+          <p:nvPr/>
+        </p:nvSpPr>
+        <p:spPr>
+          <a:xfrm>
+            <a:off x="274320" y="6446520"/>
+            <a:ext cx="11643360" cy="365760"/>
+          </a:xfrm>
+          <a:prstGeom prst="rect">
+            <a:avLst/>
+          </a:prstGeom>
+          <a:noFill/>
+        </p:spPr>
+        <p:txBody>
+          <a:bodyPr wrap="square">
+            <a:spAutoFit/>
+          </a:bodyPr>
+          <a:lstStyle/>
+          <a:p>
+            <a:r>
+              <a:rPr sz="750">
+                <a:solidFill>
+                  <a:srgbClr val="B0B8C0"/>
+                </a:solidFill>
+              </a:rPr>
+              <a:t>Reference accelerator - not an AWS service or certification. Built on AWS; not AWS-affiliated/endorsed.</a:t>
+            </a:r>
           </a:p>
         </p:txBody>
       </p:sp>
@@ -1992,6 +2031,10 @@
           </a:solidFill>
           <a:ln/>
         </p:spPr>
+        <p:txBody>
+          <a:bodyPr/>
+          <a:p/>
+        </p:txBody>
       </p:sp>
       <p:sp>
         <p:nvSpPr>
@@ -2095,6 +2138,10 @@
             <a:prstDash val="solid"/>
           </a:ln>
         </p:spPr>
+        <p:txBody>
+          <a:bodyPr/>
+          <a:p/>
+        </p:txBody>
       </p:sp>
       <p:sp>
         <p:nvSpPr>
@@ -2198,6 +2245,10 @@
             <a:prstDash val="solid"/>
           </a:ln>
         </p:spPr>
+        <p:txBody>
+          <a:bodyPr/>
+          <a:p/>
+        </p:txBody>
       </p:sp>
       <p:sp>
         <p:nvSpPr>
@@ -2301,6 +2352,10 @@
             <a:prstDash val="solid"/>
           </a:ln>
         </p:spPr>
+        <p:txBody>
+          <a:bodyPr/>
+          <a:p/>
+        </p:txBody>
       </p:sp>
       <p:sp>
         <p:nvSpPr>
@@ -2404,6 +2459,10 @@
             <a:prstDash val="solid"/>
           </a:ln>
         </p:spPr>
+        <p:txBody>
+          <a:bodyPr/>
+          <a:p/>
+        </p:txBody>
       </p:sp>
       <p:sp>
         <p:nvSpPr>
@@ -2507,6 +2566,10 @@
             <a:prstDash val="solid"/>
           </a:ln>
         </p:spPr>
+        <p:txBody>
+          <a:bodyPr/>
+          <a:p/>
+        </p:txBody>
       </p:sp>
       <p:sp>
         <p:nvSpPr>
@@ -2610,6 +2673,10 @@
             <a:prstDash val="solid"/>
           </a:ln>
         </p:spPr>
+        <p:txBody>
+          <a:bodyPr/>
+          <a:p/>
+        </p:txBody>
       </p:sp>
       <p:sp>
         <p:nvSpPr>
@@ -2713,6 +2780,10 @@
             <a:prstDash val="solid"/>
           </a:ln>
         </p:spPr>
+        <p:txBody>
+          <a:bodyPr/>
+          <a:p/>
+        </p:txBody>
       </p:sp>
       <p:sp>
         <p:nvSpPr>
@@ -2816,6 +2887,10 @@
             <a:prstDash val="solid"/>
           </a:ln>
         </p:spPr>
+        <p:txBody>
+          <a:bodyPr/>
+          <a:p/>
+        </p:txBody>
       </p:sp>
       <p:sp>
         <p:nvSpPr>
@@ -2985,6 +3060,10 @@
           </a:solidFill>
           <a:ln/>
         </p:spPr>
+        <p:txBody>
+          <a:bodyPr/>
+          <a:p/>
+        </p:txBody>
       </p:sp>
       <p:sp>
         <p:nvSpPr>
@@ -3159,6 +3238,689 @@
               <a:t>docs/DEPLOY-QUICKSTART.md  ·  docs/SUITE-ARCHITECTURE.md  ·  June 2026</a:t>
             </a:r>
             <a:endParaRPr lang="en-US" sz="1200" dirty="0"/>
+          </a:p>
+        </p:txBody>
+      </p:sp>
+    </p:spTree>
+  </p:cSld>
+  <p:clrMapOvr>
+    <a:masterClrMapping/>
+  </p:clrMapOvr>
+</p:sld>
+</file>
+
+<file path=ppt/slides/slide12.xml><?xml version="1.0" encoding="utf-8"?>
+<p:sld xmlns:a="http://schemas.openxmlformats.org/drawingml/2006/main" xmlns:p="http://schemas.openxmlformats.org/presentationml/2006/main" xmlns:r="http://schemas.openxmlformats.org/officeDocument/2006/relationships">
+  <p:cSld>
+    <p:spTree>
+      <p:nvGrpSpPr>
+        <p:cNvPr id="1" name=""/>
+        <p:cNvGrpSpPr/>
+        <p:nvPr/>
+      </p:nvGrpSpPr>
+      <p:grpSpPr/>
+      <p:sp>
+        <p:nvSpPr>
+          <p:cNvPr id="2" name="Rectangle 1"/>
+          <p:cNvSpPr/>
+          <p:nvPr/>
+        </p:nvSpPr>
+        <p:spPr>
+          <a:xfrm>
+            <a:off x="0" y="0"/>
+            <a:ext cx="12192000" cy="6858000"/>
+          </a:xfrm>
+          <a:prstGeom prst="rect">
+            <a:avLst/>
+          </a:prstGeom>
+          <a:solidFill>
+            <a:srgbClr val="232F3E"/>
+          </a:solidFill>
+          <a:ln>
+            <a:noFill/>
+          </a:ln>
+          <a:effectLst/>
+        </p:spPr>
+        <p:style>
+          <a:lnRef idx="1">
+            <a:schemeClr val="accent1"/>
+          </a:lnRef>
+          <a:fillRef idx="3">
+            <a:schemeClr val="accent1"/>
+          </a:fillRef>
+          <a:effectRef idx="2">
+            <a:schemeClr val="accent1"/>
+          </a:effectRef>
+          <a:fontRef idx="minor">
+            <a:schemeClr val="lt1"/>
+          </a:fontRef>
+        </p:style>
+        <p:txBody>
+          <a:bodyPr rtlCol="0" anchor="ctr"/>
+          <a:lstStyle/>
+          <a:p>
+            <a:pPr algn="ctr"/>
+          </a:p>
+        </p:txBody>
+      </p:sp>
+      <p:sp>
+        <p:nvSpPr>
+          <p:cNvPr id="3" name="TextBox 2"/>
+          <p:cNvSpPr txBox="1"/>
+          <p:nvPr/>
+        </p:nvSpPr>
+        <p:spPr>
+          <a:xfrm>
+            <a:off x="457200" y="320040"/>
+            <a:ext cx="11155680" cy="914400"/>
+          </a:xfrm>
+          <a:prstGeom prst="rect">
+            <a:avLst/>
+          </a:prstGeom>
+          <a:noFill/>
+        </p:spPr>
+        <p:txBody>
+          <a:bodyPr wrap="square">
+            <a:spAutoFit/>
+          </a:bodyPr>
+          <a:lstStyle/>
+          <a:p>
+            <a:r>
+              <a:rPr sz="3000" b="1">
+                <a:solidFill>
+                  <a:srgbClr val="FFFFFF"/>
+                </a:solidFill>
+              </a:rPr>
+              <a:t>Built on AWS HCLS-native services</a:t>
+            </a:r>
+          </a:p>
+          <a:p>
+            <a:r>
+              <a:rPr sz="1300">
+                <a:solidFill>
+                  <a:srgbClr val="FF9900"/>
+                </a:solidFill>
+              </a:rPr>
+              <a:t>Why this pattern belongs on AWS specifically - managed, HIPAA-eligible building blocks, one governed gateway</a:t>
+            </a:r>
+          </a:p>
+        </p:txBody>
+      </p:sp>
+      <p:graphicFrame>
+        <p:nvGraphicFramePr>
+          <p:cNvPr id="4" name="Table 3"/>
+          <p:cNvGraphicFramePr>
+            <a:graphicFrameLocks noGrp="1"/>
+          </p:cNvGraphicFramePr>
+          <p:nvPr/>
+        </p:nvGraphicFramePr>
+        <p:xfrm>
+          <a:off x="457200" y="1600200"/>
+          <a:ext cx="11155680" cy="3200400"/>
+        </p:xfrm>
+        <a:graphic>
+          <a:graphicData uri="http://schemas.openxmlformats.org/drawingml/2006/table">
+            <a:tbl>
+              <a:tblPr firstRow="1" bandRow="1">
+                <a:tableStyleId>{5C22544A-7EE6-4342-B048-85BDC9FD1C3A}</a:tableStyleId>
+              </a:tblPr>
+              <a:tblGrid>
+                <a:gridCol w="2743200"/>
+                <a:gridCol w="5852160"/>
+                <a:gridCol w="2560320"/>
+              </a:tblGrid>
+              <a:tr h="533400">
+                <a:tc>
+                  <a:txBody>
+                    <a:bodyPr/>
+                    <a:lstStyle/>
+                    <a:p>
+                      <a:r>
+                        <a:rPr b="1" sz="1200">
+                          <a:solidFill>
+                            <a:srgbClr val="232F3E"/>
+                          </a:solidFill>
+                        </a:rPr>
+                        <a:t>Agent</a:t>
+                      </a:r>
+                    </a:p>
+                  </a:txBody>
+                  <a:tcPr>
+                    <a:solidFill>
+                      <a:srgbClr val="FF9900"/>
+                    </a:solidFill>
+                  </a:tcPr>
+                </a:tc>
+                <a:tc>
+                  <a:txBody>
+                    <a:bodyPr/>
+                    <a:lstStyle/>
+                    <a:p>
+                      <a:r>
+                        <a:rPr b="1" sz="1200">
+                          <a:solidFill>
+                            <a:srgbClr val="232F3E"/>
+                          </a:solidFill>
+                        </a:rPr>
+                        <a:t>AWS HCLS-native fit</a:t>
+                      </a:r>
+                    </a:p>
+                  </a:txBody>
+                  <a:tcPr>
+                    <a:solidFill>
+                      <a:srgbClr val="FF9900"/>
+                    </a:solidFill>
+                  </a:tcPr>
+                </a:tc>
+                <a:tc>
+                  <a:txBody>
+                    <a:bodyPr/>
+                    <a:lstStyle/>
+                    <a:p>
+                      <a:r>
+                        <a:rPr b="1" sz="1200">
+                          <a:solidFill>
+                            <a:srgbClr val="232F3E"/>
+                          </a:solidFill>
+                        </a:rPr>
+                        <a:t>Status</a:t>
+                      </a:r>
+                    </a:p>
+                  </a:txBody>
+                  <a:tcPr>
+                    <a:solidFill>
+                      <a:srgbClr val="FF9900"/>
+                    </a:solidFill>
+                  </a:tcPr>
+                </a:tc>
+              </a:tr>
+              <a:tr h="533400">
+                <a:tc>
+                  <a:txBody>
+                    <a:bodyPr/>
+                    <a:lstStyle/>
+                    <a:p>
+                      <a:r>
+                        <a:rPr sz="1050" b="0">
+                          <a:solidFill>
+                            <a:srgbClr val="FFFFFF"/>
+                          </a:solidFill>
+                        </a:rPr>
+                        <a:t>02  Pharmacovigilance / ICSR</a:t>
+                      </a:r>
+                    </a:p>
+                  </a:txBody>
+                  <a:tcPr>
+                    <a:solidFill>
+                      <a:srgbClr val="232F3E"/>
+                    </a:solidFill>
+                  </a:tcPr>
+                </a:tc>
+                <a:tc>
+                  <a:txBody>
+                    <a:bodyPr/>
+                    <a:lstStyle/>
+                    <a:p>
+                      <a:r>
+                        <a:rPr sz="1050" b="0">
+                          <a:solidFill>
+                            <a:srgbClr val="FFFFFF"/>
+                          </a:solidFill>
+                        </a:rPr>
+                        <a:t>Amazon Comprehend Medical - AE + PHI extraction from case narratives</a:t>
+                      </a:r>
+                    </a:p>
+                  </a:txBody>
+                  <a:tcPr>
+                    <a:solidFill>
+                      <a:srgbClr val="232F3E"/>
+                    </a:solidFill>
+                  </a:tcPr>
+                </a:tc>
+                <a:tc>
+                  <a:txBody>
+                    <a:bodyPr/>
+                    <a:lstStyle/>
+                    <a:p>
+                      <a:r>
+                        <a:rPr sz="1050" b="1">
+                          <a:solidFill>
+                            <a:srgbClr val="01A88D"/>
+                          </a:solidFill>
+                        </a:rPr>
+                        <a:t>LIVE pattern</a:t>
+                      </a:r>
+                    </a:p>
+                  </a:txBody>
+                  <a:tcPr>
+                    <a:solidFill>
+                      <a:srgbClr val="232F3E"/>
+                    </a:solidFill>
+                  </a:tcPr>
+                </a:tc>
+              </a:tr>
+              <a:tr h="533400">
+                <a:tc>
+                  <a:txBody>
+                    <a:bodyPr/>
+                    <a:lstStyle/>
+                    <a:p>
+                      <a:r>
+                        <a:rPr sz="1050" b="0">
+                          <a:solidFill>
+                            <a:srgbClr val="FFFFFF"/>
+                          </a:solidFill>
+                        </a:rPr>
+                        <a:t>04  Site &amp; Patient Matching</a:t>
+                      </a:r>
+                    </a:p>
+                  </a:txBody>
+                  <a:tcPr>
+                    <a:solidFill>
+                      <a:srgbClr val="232F3E"/>
+                    </a:solidFill>
+                  </a:tcPr>
+                </a:tc>
+                <a:tc>
+                  <a:txBody>
+                    <a:bodyPr/>
+                    <a:lstStyle/>
+                    <a:p>
+                      <a:r>
+                        <a:rPr sz="1050" b="0">
+                          <a:solidFill>
+                            <a:srgbClr val="FFFFFF"/>
+                          </a:solidFill>
+                        </a:rPr>
+                        <a:t>Amazon HealthLake (FHIR RWD cohorts) + HealthOmics</a:t>
+                      </a:r>
+                    </a:p>
+                  </a:txBody>
+                  <a:tcPr>
+                    <a:solidFill>
+                      <a:srgbClr val="232F3E"/>
+                    </a:solidFill>
+                  </a:tcPr>
+                </a:tc>
+                <a:tc>
+                  <a:txBody>
+                    <a:bodyPr/>
+                    <a:lstStyle/>
+                    <a:p>
+                      <a:r>
+                        <a:rPr sz="1050" b="0">
+                          <a:solidFill>
+                            <a:srgbClr val="FFFFFF"/>
+                          </a:solidFill>
+                        </a:rPr>
+                        <a:t>Roadmap</a:t>
+                      </a:r>
+                    </a:p>
+                  </a:txBody>
+                  <a:tcPr>
+                    <a:solidFill>
+                      <a:srgbClr val="232F3E"/>
+                    </a:solidFill>
+                  </a:tcPr>
+                </a:tc>
+              </a:tr>
+              <a:tr h="533400">
+                <a:tc>
+                  <a:txBody>
+                    <a:bodyPr/>
+                    <a:lstStyle/>
+                    <a:p>
+                      <a:r>
+                        <a:rPr sz="1050" b="0">
+                          <a:solidFill>
+                            <a:srgbClr val="FFFFFF"/>
+                          </a:solidFill>
+                        </a:rPr>
+                        <a:t>07  RWE / HEOR</a:t>
+                      </a:r>
+                    </a:p>
+                  </a:txBody>
+                  <a:tcPr>
+                    <a:solidFill>
+                      <a:srgbClr val="232F3E"/>
+                    </a:solidFill>
+                  </a:tcPr>
+                </a:tc>
+                <a:tc>
+                  <a:txBody>
+                    <a:bodyPr/>
+                    <a:lstStyle/>
+                    <a:p>
+                      <a:r>
+                        <a:rPr sz="1050" b="0">
+                          <a:solidFill>
+                            <a:srgbClr val="FFFFFF"/>
+                          </a:solidFill>
+                        </a:rPr>
+                        <a:t>Amazon HealthLake + HealthOmics (variant / genomic RWD)</a:t>
+                      </a:r>
+                    </a:p>
+                  </a:txBody>
+                  <a:tcPr>
+                    <a:solidFill>
+                      <a:srgbClr val="232F3E"/>
+                    </a:solidFill>
+                  </a:tcPr>
+                </a:tc>
+                <a:tc>
+                  <a:txBody>
+                    <a:bodyPr/>
+                    <a:lstStyle/>
+                    <a:p>
+                      <a:r>
+                        <a:rPr sz="1050" b="0">
+                          <a:solidFill>
+                            <a:srgbClr val="FFFFFF"/>
+                          </a:solidFill>
+                        </a:rPr>
+                        <a:t>Roadmap</a:t>
+                      </a:r>
+                    </a:p>
+                  </a:txBody>
+                  <a:tcPr>
+                    <a:solidFill>
+                      <a:srgbClr val="232F3E"/>
+                    </a:solidFill>
+                  </a:tcPr>
+                </a:tc>
+              </a:tr>
+              <a:tr h="533400">
+                <a:tc>
+                  <a:txBody>
+                    <a:bodyPr/>
+                    <a:lstStyle/>
+                    <a:p>
+                      <a:r>
+                        <a:rPr sz="1050" b="0">
+                          <a:solidFill>
+                            <a:srgbClr val="FFFFFF"/>
+                          </a:solidFill>
+                        </a:rPr>
+                        <a:t>03  Clinical Trial Ops / TMF</a:t>
+                      </a:r>
+                    </a:p>
+                  </a:txBody>
+                  <a:tcPr>
+                    <a:solidFill>
+                      <a:srgbClr val="232F3E"/>
+                    </a:solidFill>
+                  </a:tcPr>
+                </a:tc>
+                <a:tc>
+                  <a:txBody>
+                    <a:bodyPr/>
+                    <a:lstStyle/>
+                    <a:p>
+                      <a:r>
+                        <a:rPr sz="1050" b="0">
+                          <a:solidFill>
+                            <a:srgbClr val="FFFFFF"/>
+                          </a:solidFill>
+                        </a:rPr>
+                        <a:t>Comprehend Medical + Amazon Textract (TMF doc understanding)</a:t>
+                      </a:r>
+                    </a:p>
+                  </a:txBody>
+                  <a:tcPr>
+                    <a:solidFill>
+                      <a:srgbClr val="232F3E"/>
+                    </a:solidFill>
+                  </a:tcPr>
+                </a:tc>
+                <a:tc>
+                  <a:txBody>
+                    <a:bodyPr/>
+                    <a:lstStyle/>
+                    <a:p>
+                      <a:r>
+                        <a:rPr sz="1050" b="0">
+                          <a:solidFill>
+                            <a:srgbClr val="FFFFFF"/>
+                          </a:solidFill>
+                        </a:rPr>
+                        <a:t>Roadmap</a:t>
+                      </a:r>
+                    </a:p>
+                  </a:txBody>
+                  <a:tcPr>
+                    <a:solidFill>
+                      <a:srgbClr val="232F3E"/>
+                    </a:solidFill>
+                  </a:tcPr>
+                </a:tc>
+              </a:tr>
+              <a:tr h="533400">
+                <a:tc>
+                  <a:txBody>
+                    <a:bodyPr/>
+                    <a:lstStyle/>
+                    <a:p>
+                      <a:r>
+                        <a:rPr sz="1050" b="0">
+                          <a:solidFill>
+                            <a:srgbClr val="FFFFFF"/>
+                          </a:solidFill>
+                        </a:rPr>
+                        <a:t>All agents</a:t>
+                      </a:r>
+                    </a:p>
+                  </a:txBody>
+                  <a:tcPr>
+                    <a:solidFill>
+                      <a:srgbClr val="232F3E"/>
+                    </a:solidFill>
+                  </a:tcPr>
+                </a:tc>
+                <a:tc>
+                  <a:txBody>
+                    <a:bodyPr/>
+                    <a:lstStyle/>
+                    <a:p>
+                      <a:r>
+                        <a:rPr sz="1050" b="0">
+                          <a:solidFill>
+                            <a:srgbClr val="FFFFFF"/>
+                          </a:solidFill>
+                        </a:rPr>
+                        <a:t>Amazon Bedrock + Guardrails - Knowledge Bases (grounding) - Textract (intake)</a:t>
+                      </a:r>
+                    </a:p>
+                  </a:txBody>
+                  <a:tcPr>
+                    <a:solidFill>
+                      <a:srgbClr val="232F3E"/>
+                    </a:solidFill>
+                  </a:tcPr>
+                </a:tc>
+                <a:tc>
+                  <a:txBody>
+                    <a:bodyPr/>
+                    <a:lstStyle/>
+                    <a:p>
+                      <a:r>
+                        <a:rPr sz="1050" b="0">
+                          <a:solidFill>
+                            <a:srgbClr val="FFFFFF"/>
+                          </a:solidFill>
+                        </a:rPr>
+                        <a:t>Fit</a:t>
+                      </a:r>
+                    </a:p>
+                  </a:txBody>
+                  <a:tcPr>
+                    <a:solidFill>
+                      <a:srgbClr val="232F3E"/>
+                    </a:solidFill>
+                  </a:tcPr>
+                </a:tc>
+              </a:tr>
+            </a:tbl>
+          </a:graphicData>
+        </a:graphic>
+      </p:graphicFrame>
+      <p:sp>
+        <p:nvSpPr>
+          <p:cNvPr id="5" name="TextBox 4"/>
+          <p:cNvSpPr txBox="1"/>
+          <p:nvPr/>
+        </p:nvSpPr>
+        <p:spPr>
+          <a:xfrm>
+            <a:off x="457200" y="6172200"/>
+            <a:ext cx="11155680" cy="548640"/>
+          </a:xfrm>
+          <a:prstGeom prst="rect">
+            <a:avLst/>
+          </a:prstGeom>
+          <a:noFill/>
+        </p:spPr>
+        <p:txBody>
+          <a:bodyPr wrap="square">
+            <a:spAutoFit/>
+          </a:bodyPr>
+          <a:lstStyle/>
+          <a:p>
+            <a:r>
+              <a:rPr sz="850">
+                <a:solidFill>
+                  <a:srgbClr val="B0B8C0"/>
+                </a:solidFill>
+              </a:rPr>
+              <a:t>Architectural fit / roadmap except where marked LIVE. Comprehend Medical is wired (opt-in, fail-closed) in the healthcare payer/provider suite. HIPAA-eligible services reached via regional API / PrivateLink under the customer AWS BAA.</a:t>
+            </a:r>
+          </a:p>
+        </p:txBody>
+      </p:sp>
+    </p:spTree>
+  </p:cSld>
+  <p:clrMapOvr>
+    <a:masterClrMapping/>
+  </p:clrMapOvr>
+</p:sld>
+</file>
+
+<file path=ppt/slides/slide13.xml><?xml version="1.0" encoding="utf-8"?>
+<p:sld xmlns:a="http://schemas.openxmlformats.org/drawingml/2006/main" xmlns:p="http://schemas.openxmlformats.org/presentationml/2006/main" xmlns:r="http://schemas.openxmlformats.org/officeDocument/2006/relationships">
+  <p:cSld>
+    <p:spTree>
+      <p:nvGrpSpPr>
+        <p:cNvPr id="1" name=""/>
+        <p:cNvGrpSpPr/>
+        <p:nvPr/>
+      </p:nvGrpSpPr>
+      <p:grpSpPr/>
+      <p:sp>
+        <p:nvSpPr>
+          <p:cNvPr id="2" name="Rectangle 1"/>
+          <p:cNvSpPr/>
+          <p:nvPr/>
+        </p:nvSpPr>
+        <p:spPr>
+          <a:xfrm>
+            <a:off x="0" y="0"/>
+            <a:ext cx="12192000" cy="6858000"/>
+          </a:xfrm>
+          <a:prstGeom prst="rect">
+            <a:avLst/>
+          </a:prstGeom>
+          <a:solidFill>
+            <a:srgbClr val="232F3E"/>
+          </a:solidFill>
+          <a:ln>
+            <a:noFill/>
+          </a:ln>
+          <a:effectLst/>
+        </p:spPr>
+        <p:style>
+          <a:lnRef idx="1">
+            <a:schemeClr val="accent1"/>
+          </a:lnRef>
+          <a:fillRef idx="3">
+            <a:schemeClr val="accent1"/>
+          </a:fillRef>
+          <a:effectRef idx="2">
+            <a:schemeClr val="accent1"/>
+          </a:effectRef>
+          <a:fontRef idx="minor">
+            <a:schemeClr val="lt1"/>
+          </a:fontRef>
+        </p:style>
+        <p:txBody>
+          <a:bodyPr rtlCol="0" anchor="ctr"/>
+          <a:lstStyle/>
+          <a:p>
+            <a:pPr algn="ctr"/>
+          </a:p>
+        </p:txBody>
+      </p:sp>
+      <p:sp>
+        <p:nvSpPr>
+          <p:cNvPr id="3" name="TextBox 2"/>
+          <p:cNvSpPr txBox="1"/>
+          <p:nvPr/>
+        </p:nvSpPr>
+        <p:spPr>
+          <a:xfrm>
+            <a:off x="548640" y="640080"/>
+            <a:ext cx="11094720" cy="914400"/>
+          </a:xfrm>
+          <a:prstGeom prst="rect">
+            <a:avLst/>
+          </a:prstGeom>
+          <a:noFill/>
+        </p:spPr>
+        <p:txBody>
+          <a:bodyPr wrap="none">
+            <a:spAutoFit/>
+          </a:bodyPr>
+          <a:lstStyle/>
+          <a:p>
+            <a:r>
+              <a:rPr sz="3000" b="1">
+                <a:solidFill>
+                  <a:srgbClr val="FF9900"/>
+                </a:solidFill>
+              </a:rPr>
+              <a:t>Disclaimer &amp; shared responsibility</a:t>
+            </a:r>
+          </a:p>
+        </p:txBody>
+      </p:sp>
+      <p:sp>
+        <p:nvSpPr>
+          <p:cNvPr id="4" name="TextBox 3"/>
+          <p:cNvSpPr txBox="1"/>
+          <p:nvPr/>
+        </p:nvSpPr>
+        <p:spPr>
+          <a:xfrm>
+            <a:off x="640080" y="1828800"/>
+            <a:ext cx="10911840" cy="3108960"/>
+          </a:xfrm>
+          <a:prstGeom prst="rect">
+            <a:avLst/>
+          </a:prstGeom>
+          <a:noFill/>
+        </p:spPr>
+        <p:txBody>
+          <a:bodyPr wrap="square">
+            <a:spAutoFit/>
+          </a:bodyPr>
+          <a:lstStyle/>
+          <a:p>
+            <a:r>
+              <a:rPr sz="1600">
+                <a:solidFill>
+                  <a:srgbClr val="FFFFFF"/>
+                </a:solidFill>
+              </a:rPr>
+              <a:t>Reference accelerator - not an AWS service, not AWS-supported software, not a compliance certification, and not production-ready for regulated data without customer-specific engineering, testing, authorization, and operational ownership. Built on AWS; not affiliated with or endorsed by Amazon Web Services.</a:t>
+            </a:r>
           </a:p>
         </p:txBody>
       </p:sp>
@@ -3213,6 +3975,10 @@
           </a:solidFill>
           <a:ln/>
         </p:spPr>
+        <p:txBody>
+          <a:bodyPr/>
+          <a:p/>
+        </p:txBody>
       </p:sp>
       <p:sp>
         <p:nvSpPr>
@@ -3316,6 +4082,10 @@
             <a:prstDash val="solid"/>
           </a:ln>
         </p:spPr>
+        <p:txBody>
+          <a:bodyPr/>
+          <a:p/>
+        </p:txBody>
       </p:sp>
       <p:sp>
         <p:nvSpPr>
@@ -3458,6 +4228,10 @@
             <a:prstDash val="solid"/>
           </a:ln>
         </p:spPr>
+        <p:txBody>
+          <a:bodyPr/>
+          <a:p/>
+        </p:txBody>
       </p:sp>
       <p:sp>
         <p:nvSpPr>
@@ -3600,6 +4374,10 @@
             <a:prstDash val="solid"/>
           </a:ln>
         </p:spPr>
+        <p:txBody>
+          <a:bodyPr/>
+          <a:p/>
+        </p:txBody>
       </p:sp>
       <p:sp>
         <p:nvSpPr>
@@ -3847,6 +4625,10 @@
           </a:solidFill>
           <a:ln/>
         </p:spPr>
+        <p:txBody>
+          <a:bodyPr/>
+          <a:p/>
+        </p:txBody>
       </p:sp>
       <p:sp>
         <p:nvSpPr>
@@ -3908,6 +4690,10 @@
             <a:prstDash val="dash"/>
           </a:ln>
         </p:spPr>
+        <p:txBody>
+          <a:bodyPr/>
+          <a:p/>
+        </p:txBody>
       </p:sp>
       <p:sp>
         <p:nvSpPr>
@@ -3967,6 +4753,10 @@
           </a:solidFill>
           <a:ln/>
         </p:spPr>
+        <p:txBody>
+          <a:bodyPr/>
+          <a:p/>
+        </p:txBody>
       </p:sp>
       <p:sp>
         <p:nvSpPr>
@@ -4029,6 +4819,10 @@
           </a:solidFill>
           <a:ln/>
         </p:spPr>
+        <p:txBody>
+          <a:bodyPr/>
+          <a:p/>
+        </p:txBody>
       </p:sp>
       <p:sp>
         <p:nvSpPr>
@@ -4111,6 +4905,10 @@
           </a:solidFill>
           <a:ln/>
         </p:spPr>
+        <p:txBody>
+          <a:bodyPr/>
+          <a:p/>
+        </p:txBody>
       </p:sp>
       <p:sp>
         <p:nvSpPr>
@@ -4193,6 +4991,10 @@
           </a:solidFill>
           <a:ln/>
         </p:spPr>
+        <p:txBody>
+          <a:bodyPr/>
+          <a:p/>
+        </p:txBody>
       </p:sp>
       <p:sp>
         <p:nvSpPr>
@@ -4296,6 +5098,10 @@
             <a:prstDash val="dash"/>
           </a:ln>
         </p:spPr>
+        <p:txBody>
+          <a:bodyPr/>
+          <a:p/>
+        </p:txBody>
       </p:sp>
       <p:sp>
         <p:nvSpPr>
@@ -4357,6 +5163,10 @@
             <a:prstDash val="dash"/>
           </a:ln>
         </p:spPr>
+        <p:txBody>
+          <a:bodyPr/>
+          <a:p/>
+        </p:txBody>
       </p:sp>
       <p:sp>
         <p:nvSpPr>
@@ -4416,6 +5226,10 @@
           </a:solidFill>
           <a:ln/>
         </p:spPr>
+        <p:txBody>
+          <a:bodyPr/>
+          <a:p/>
+        </p:txBody>
       </p:sp>
       <p:sp>
         <p:nvSpPr>
@@ -4478,6 +5292,10 @@
           </a:solidFill>
           <a:ln/>
         </p:spPr>
+        <p:txBody>
+          <a:bodyPr/>
+          <a:p/>
+        </p:txBody>
       </p:sp>
       <p:sp>
         <p:nvSpPr>
@@ -4540,6 +5358,10 @@
           </a:solidFill>
           <a:ln/>
         </p:spPr>
+        <p:txBody>
+          <a:bodyPr/>
+          <a:p/>
+        </p:txBody>
       </p:sp>
       <p:sp>
         <p:nvSpPr>
@@ -4604,6 +5426,10 @@
             <a:prstDash val="dash"/>
           </a:ln>
         </p:spPr>
+        <p:txBody>
+          <a:bodyPr/>
+          <a:p/>
+        </p:txBody>
       </p:sp>
       <p:sp>
         <p:nvSpPr>
@@ -4663,6 +5489,10 @@
           </a:solidFill>
           <a:ln/>
         </p:spPr>
+        <p:txBody>
+          <a:bodyPr/>
+          <a:p/>
+        </p:txBody>
       </p:sp>
       <p:sp>
         <p:nvSpPr>
@@ -4725,6 +5555,10 @@
           </a:solidFill>
           <a:ln/>
         </p:spPr>
+        <p:txBody>
+          <a:bodyPr/>
+          <a:p/>
+        </p:txBody>
       </p:sp>
       <p:sp>
         <p:nvSpPr>
@@ -4807,6 +5641,10 @@
           </a:solidFill>
           <a:ln/>
         </p:spPr>
+        <p:txBody>
+          <a:bodyPr/>
+          <a:p/>
+        </p:txBody>
       </p:sp>
       <p:sp>
         <p:nvSpPr>
@@ -4891,6 +5729,10 @@
             <a:prstDash val="dash"/>
           </a:ln>
         </p:spPr>
+        <p:txBody>
+          <a:bodyPr/>
+          <a:p/>
+        </p:txBody>
       </p:sp>
       <p:sp>
         <p:nvSpPr>
@@ -4950,6 +5792,10 @@
           </a:solidFill>
           <a:ln/>
         </p:spPr>
+        <p:txBody>
+          <a:bodyPr/>
+          <a:p/>
+        </p:txBody>
       </p:sp>
       <p:sp>
         <p:nvSpPr>
@@ -5032,6 +5878,10 @@
           </a:solidFill>
           <a:ln/>
         </p:spPr>
+        <p:txBody>
+          <a:bodyPr/>
+          <a:p/>
+        </p:txBody>
       </p:sp>
       <p:sp>
         <p:nvSpPr>
@@ -5116,6 +5966,10 @@
             <a:prstDash val="dash"/>
           </a:ln>
         </p:spPr>
+        <p:txBody>
+          <a:bodyPr/>
+          <a:p/>
+        </p:txBody>
       </p:sp>
       <p:sp>
         <p:nvSpPr>
@@ -5175,6 +6029,10 @@
           </a:solidFill>
           <a:ln/>
         </p:spPr>
+        <p:txBody>
+          <a:bodyPr/>
+          <a:p/>
+        </p:txBody>
       </p:sp>
       <p:sp>
         <p:nvSpPr>
@@ -5257,6 +6115,10 @@
           </a:solidFill>
           <a:ln/>
         </p:spPr>
+        <p:txBody>
+          <a:bodyPr/>
+          <a:p/>
+        </p:txBody>
       </p:sp>
       <p:sp>
         <p:nvSpPr>
@@ -5339,6 +6201,10 @@
           </a:solidFill>
           <a:ln/>
         </p:spPr>
+        <p:txBody>
+          <a:bodyPr/>
+          <a:p/>
+        </p:txBody>
       </p:sp>
       <p:sp>
         <p:nvSpPr>
@@ -5421,6 +6287,10 @@
           </a:solidFill>
           <a:ln/>
         </p:spPr>
+        <p:txBody>
+          <a:bodyPr/>
+          <a:p/>
+        </p:txBody>
       </p:sp>
       <p:sp>
         <p:nvSpPr>
@@ -5503,6 +6373,10 @@
           </a:solidFill>
           <a:ln/>
         </p:spPr>
+        <p:txBody>
+          <a:bodyPr/>
+          <a:p/>
+        </p:txBody>
       </p:sp>
       <p:sp>
         <p:nvSpPr>
@@ -5581,6 +6455,10 @@
             <a:prstDash val="solid"/>
           </a:ln>
         </p:spPr>
+        <p:txBody>
+          <a:bodyPr/>
+          <a:p/>
+        </p:txBody>
       </p:sp>
       <p:sp>
         <p:nvSpPr>
@@ -5645,6 +6523,10 @@
             <a:prstDash val="solid"/>
           </a:ln>
         </p:spPr>
+        <p:txBody>
+          <a:bodyPr/>
+          <a:p/>
+        </p:txBody>
       </p:sp>
       <p:sp>
         <p:nvSpPr>
@@ -5709,6 +6591,10 @@
             <a:prstDash val="solid"/>
           </a:ln>
         </p:spPr>
+        <p:txBody>
+          <a:bodyPr/>
+          <a:p/>
+        </p:txBody>
       </p:sp>
       <p:sp>
         <p:nvSpPr>
@@ -5773,6 +6659,10 @@
             <a:prstDash val="solid"/>
           </a:ln>
         </p:spPr>
+        <p:txBody>
+          <a:bodyPr/>
+          <a:p/>
+        </p:txBody>
       </p:sp>
       <p:sp>
         <p:nvSpPr>
@@ -5837,6 +6727,10 @@
             <a:prstDash val="solid"/>
           </a:ln>
         </p:spPr>
+        <p:txBody>
+          <a:bodyPr/>
+          <a:p/>
+        </p:txBody>
       </p:sp>
       <p:sp>
         <p:nvSpPr>
@@ -5901,6 +6795,10 @@
             <a:prstDash val="solid"/>
           </a:ln>
         </p:spPr>
+        <p:txBody>
+          <a:bodyPr/>
+          <a:p/>
+        </p:txBody>
       </p:sp>
       <p:sp>
         <p:nvSpPr>
@@ -5965,6 +6863,10 @@
             <a:prstDash val="solid"/>
           </a:ln>
         </p:spPr>
+        <p:txBody>
+          <a:bodyPr/>
+          <a:p/>
+        </p:txBody>
       </p:sp>
       <p:sp>
         <p:nvSpPr>
@@ -6029,6 +6931,10 @@
             <a:prstDash val="solid"/>
           </a:ln>
         </p:spPr>
+        <p:txBody>
+          <a:bodyPr/>
+          <a:p/>
+        </p:txBody>
       </p:sp>
       <p:sp>
         <p:nvSpPr>
@@ -6162,6 +7068,10 @@
           </a:solidFill>
           <a:ln/>
         </p:spPr>
+        <p:txBody>
+          <a:bodyPr/>
+          <a:p/>
+        </p:txBody>
       </p:sp>
       <p:sp>
         <p:nvSpPr>
@@ -6228,6 +7138,10 @@
             </a:outerShdw>
           </a:effectLst>
         </p:spPr>
+        <p:txBody>
+          <a:bodyPr/>
+          <a:p/>
+        </p:txBody>
       </p:sp>
       <p:sp>
         <p:nvSpPr>
@@ -6248,6 +7162,10 @@
           </a:solidFill>
           <a:ln/>
         </p:spPr>
+        <p:txBody>
+          <a:bodyPr/>
+          <a:p/>
+        </p:txBody>
       </p:sp>
       <p:sp>
         <p:nvSpPr>
@@ -6510,6 +7428,10 @@
             </a:outerShdw>
           </a:effectLst>
         </p:spPr>
+        <p:txBody>
+          <a:bodyPr/>
+          <a:p/>
+        </p:txBody>
       </p:sp>
       <p:sp>
         <p:nvSpPr>
@@ -6530,6 +7452,10 @@
           </a:solidFill>
           <a:ln/>
         </p:spPr>
+        <p:txBody>
+          <a:bodyPr/>
+          <a:p/>
+        </p:txBody>
       </p:sp>
       <p:sp>
         <p:nvSpPr>
@@ -6792,6 +7718,10 @@
             </a:outerShdw>
           </a:effectLst>
         </p:spPr>
+        <p:txBody>
+          <a:bodyPr/>
+          <a:p/>
+        </p:txBody>
       </p:sp>
       <p:sp>
         <p:nvSpPr>
@@ -6812,6 +7742,10 @@
           </a:solidFill>
           <a:ln/>
         </p:spPr>
+        <p:txBody>
+          <a:bodyPr/>
+          <a:p/>
+        </p:txBody>
       </p:sp>
       <p:sp>
         <p:nvSpPr>
@@ -7074,6 +8008,10 @@
             </a:outerShdw>
           </a:effectLst>
         </p:spPr>
+        <p:txBody>
+          <a:bodyPr/>
+          <a:p/>
+        </p:txBody>
       </p:sp>
       <p:sp>
         <p:nvSpPr>
@@ -7094,6 +8032,10 @@
           </a:solidFill>
           <a:ln/>
         </p:spPr>
+        <p:txBody>
+          <a:bodyPr/>
+          <a:p/>
+        </p:txBody>
       </p:sp>
       <p:sp>
         <p:nvSpPr>
@@ -7420,6 +8362,10 @@
           </a:solidFill>
           <a:ln/>
         </p:spPr>
+        <p:txBody>
+          <a:bodyPr/>
+          <a:p/>
+        </p:txBody>
       </p:sp>
       <p:sp>
         <p:nvSpPr>
@@ -7486,6 +8432,10 @@
             </a:outerShdw>
           </a:effectLst>
         </p:spPr>
+        <p:txBody>
+          <a:bodyPr/>
+          <a:p/>
+        </p:txBody>
       </p:sp>
       <p:sp>
         <p:nvSpPr>
@@ -7506,6 +8456,10 @@
           </a:solidFill>
           <a:ln/>
         </p:spPr>
+        <p:txBody>
+          <a:bodyPr/>
+          <a:p/>
+        </p:txBody>
       </p:sp>
       <p:sp>
         <p:nvSpPr>
@@ -7768,6 +8722,10 @@
             </a:outerShdw>
           </a:effectLst>
         </p:spPr>
+        <p:txBody>
+          <a:bodyPr/>
+          <a:p/>
+        </p:txBody>
       </p:sp>
       <p:sp>
         <p:nvSpPr>
@@ -7788,6 +8746,10 @@
           </a:solidFill>
           <a:ln/>
         </p:spPr>
+        <p:txBody>
+          <a:bodyPr/>
+          <a:p/>
+        </p:txBody>
       </p:sp>
       <p:sp>
         <p:nvSpPr>
@@ -8050,6 +9012,10 @@
             </a:outerShdw>
           </a:effectLst>
         </p:spPr>
+        <p:txBody>
+          <a:bodyPr/>
+          <a:p/>
+        </p:txBody>
       </p:sp>
       <p:sp>
         <p:nvSpPr>
@@ -8070,6 +9036,10 @@
           </a:solidFill>
           <a:ln/>
         </p:spPr>
+        <p:txBody>
+          <a:bodyPr/>
+          <a:p/>
+        </p:txBody>
       </p:sp>
       <p:sp>
         <p:nvSpPr>
@@ -8332,6 +9302,10 @@
             </a:outerShdw>
           </a:effectLst>
         </p:spPr>
+        <p:txBody>
+          <a:bodyPr/>
+          <a:p/>
+        </p:txBody>
       </p:sp>
       <p:sp>
         <p:nvSpPr>
@@ -8352,6 +9326,10 @@
           </a:solidFill>
           <a:ln/>
         </p:spPr>
+        <p:txBody>
+          <a:bodyPr/>
+          <a:p/>
+        </p:txBody>
       </p:sp>
       <p:sp>
         <p:nvSpPr>
@@ -8678,6 +9656,10 @@
           </a:solidFill>
           <a:ln/>
         </p:spPr>
+        <p:txBody>
+          <a:bodyPr/>
+          <a:p/>
+        </p:txBody>
       </p:sp>
       <p:sp>
         <p:nvSpPr>
@@ -8776,6 +9758,10 @@
           </a:solidFill>
           <a:ln/>
         </p:spPr>
+        <p:txBody>
+          <a:bodyPr/>
+          <a:p/>
+        </p:txBody>
       </p:sp>
       <p:sp>
         <p:nvSpPr>
@@ -8879,6 +9865,10 @@
             <a:prstDash val="solid"/>
           </a:ln>
         </p:spPr>
+        <p:txBody>
+          <a:bodyPr/>
+          <a:p/>
+        </p:txBody>
       </p:sp>
       <p:sp>
         <p:nvSpPr>
@@ -8899,6 +9889,10 @@
           </a:solidFill>
           <a:ln/>
         </p:spPr>
+        <p:txBody>
+          <a:bodyPr/>
+          <a:p/>
+        </p:txBody>
       </p:sp>
       <p:sp>
         <p:nvSpPr>
@@ -9005,6 +9999,10 @@
             <a:prstDash val="solid"/>
           </a:ln>
         </p:spPr>
+        <p:txBody>
+          <a:bodyPr/>
+          <a:p/>
+        </p:txBody>
       </p:sp>
       <p:sp>
         <p:nvSpPr>
@@ -9025,6 +10023,10 @@
           </a:solidFill>
           <a:ln/>
         </p:spPr>
+        <p:txBody>
+          <a:bodyPr/>
+          <a:p/>
+        </p:txBody>
       </p:sp>
       <p:sp>
         <p:nvSpPr>
@@ -9131,6 +10133,10 @@
             <a:prstDash val="solid"/>
           </a:ln>
         </p:spPr>
+        <p:txBody>
+          <a:bodyPr/>
+          <a:p/>
+        </p:txBody>
       </p:sp>
       <p:sp>
         <p:nvSpPr>
@@ -9151,6 +10157,10 @@
           </a:solidFill>
           <a:ln/>
         </p:spPr>
+        <p:txBody>
+          <a:bodyPr/>
+          <a:p/>
+        </p:txBody>
       </p:sp>
       <p:sp>
         <p:nvSpPr>
@@ -9257,6 +10267,10 @@
             <a:prstDash val="solid"/>
           </a:ln>
         </p:spPr>
+        <p:txBody>
+          <a:bodyPr/>
+          <a:p/>
+        </p:txBody>
       </p:sp>
       <p:sp>
         <p:nvSpPr>
@@ -9277,6 +10291,10 @@
           </a:solidFill>
           <a:ln/>
         </p:spPr>
+        <p:txBody>
+          <a:bodyPr/>
+          <a:p/>
+        </p:txBody>
       </p:sp>
       <p:sp>
         <p:nvSpPr>
@@ -9383,6 +10401,10 @@
             <a:prstDash val="solid"/>
           </a:ln>
         </p:spPr>
+        <p:txBody>
+          <a:bodyPr/>
+          <a:p/>
+        </p:txBody>
       </p:sp>
       <p:sp>
         <p:nvSpPr>
@@ -9403,6 +10425,10 @@
           </a:solidFill>
           <a:ln/>
         </p:spPr>
+        <p:txBody>
+          <a:bodyPr/>
+          <a:p/>
+        </p:txBody>
       </p:sp>
       <p:sp>
         <p:nvSpPr>
@@ -9509,6 +10535,10 @@
             <a:prstDash val="solid"/>
           </a:ln>
         </p:spPr>
+        <p:txBody>
+          <a:bodyPr/>
+          <a:p/>
+        </p:txBody>
       </p:sp>
       <p:sp>
         <p:nvSpPr>
@@ -9529,6 +10559,10 @@
           </a:solidFill>
           <a:ln/>
         </p:spPr>
+        <p:txBody>
+          <a:bodyPr/>
+          <a:p/>
+        </p:txBody>
       </p:sp>
       <p:sp>
         <p:nvSpPr>
@@ -9701,6 +10735,10 @@
           </a:solidFill>
           <a:ln/>
         </p:spPr>
+        <p:txBody>
+          <a:bodyPr/>
+          <a:p/>
+        </p:txBody>
       </p:sp>
       <p:sp>
         <p:nvSpPr>
@@ -9806,6 +10844,10 @@
             </a:outerShdw>
           </a:effectLst>
         </p:spPr>
+        <p:txBody>
+          <a:bodyPr/>
+          <a:p/>
+        </p:txBody>
       </p:sp>
       <p:sp>
         <p:nvSpPr>
@@ -9917,6 +10959,10 @@
             </a:outerShdw>
           </a:effectLst>
         </p:spPr>
+        <p:txBody>
+          <a:bodyPr/>
+          <a:p/>
+        </p:txBody>
       </p:sp>
       <p:sp>
         <p:nvSpPr>
@@ -10028,6 +11074,10 @@
             </a:outerShdw>
           </a:effectLst>
         </p:spPr>
+        <p:txBody>
+          <a:bodyPr/>
+          <a:p/>
+        </p:txBody>
       </p:sp>
       <p:sp>
         <p:nvSpPr>
@@ -10139,6 +11189,10 @@
             </a:outerShdw>
           </a:effectLst>
         </p:spPr>
+        <p:txBody>
+          <a:bodyPr/>
+          <a:p/>
+        </p:txBody>
       </p:sp>
       <p:sp>
         <p:nvSpPr>
@@ -10353,6 +11407,10 @@
           </a:solidFill>
           <a:ln/>
         </p:spPr>
+        <p:txBody>
+          <a:bodyPr/>
+          <a:p/>
+        </p:txBody>
       </p:sp>
       <p:sp>
         <p:nvSpPr>
@@ -10419,6 +11477,10 @@
             </a:outerShdw>
           </a:effectLst>
         </p:spPr>
+        <p:txBody>
+          <a:bodyPr/>
+          <a:p/>
+        </p:txBody>
       </p:sp>
       <p:sp>
         <p:nvSpPr>
@@ -10566,6 +11628,10 @@
             </a:outerShdw>
           </a:effectLst>
         </p:spPr>
+        <p:txBody>
+          <a:bodyPr/>
+          <a:p/>
+        </p:txBody>
       </p:sp>
       <p:sp>
         <p:nvSpPr>
@@ -10713,6 +11779,10 @@
             </a:outerShdw>
           </a:effectLst>
         </p:spPr>
+        <p:txBody>
+          <a:bodyPr/>
+          <a:p/>
+        </p:txBody>
       </p:sp>
       <p:sp>
         <p:nvSpPr>
@@ -10860,6 +11930,10 @@
             </a:outerShdw>
           </a:effectLst>
         </p:spPr>
+        <p:txBody>
+          <a:bodyPr/>
+          <a:p/>
+        </p:txBody>
       </p:sp>
       <p:sp>
         <p:nvSpPr>
@@ -11007,6 +12081,10 @@
             </a:outerShdw>
           </a:effectLst>
         </p:spPr>
+        <p:txBody>
+          <a:bodyPr/>
+          <a:p/>
+        </p:txBody>
       </p:sp>
       <p:sp>
         <p:nvSpPr>
@@ -11154,6 +12232,10 @@
             </a:outerShdw>
           </a:effectLst>
         </p:spPr>
+        <p:txBody>
+          <a:bodyPr/>
+          <a:p/>
+        </p:txBody>
       </p:sp>
       <p:sp>
         <p:nvSpPr>
@@ -11404,6 +12486,10 @@
           </a:solidFill>
           <a:ln/>
         </p:spPr>
+        <p:txBody>
+          <a:bodyPr/>
+          <a:p/>
+        </p:txBody>
       </p:sp>
       <p:sp>
         <p:nvSpPr>
@@ -11509,6 +12595,10 @@
             </a:outerShdw>
           </a:effectLst>
         </p:spPr>
+        <p:txBody>
+          <a:bodyPr/>
+          <a:p/>
+        </p:txBody>
       </p:sp>
       <p:sp>
         <p:nvSpPr>
@@ -11529,6 +12619,10 @@
           </a:solidFill>
           <a:ln/>
         </p:spPr>
+        <p:txBody>
+          <a:bodyPr/>
+          <a:p/>
+        </p:txBody>
       </p:sp>
       <p:sp>
         <p:nvSpPr>
@@ -11676,6 +12770,10 @@
             </a:outerShdw>
           </a:effectLst>
         </p:spPr>
+        <p:txBody>
+          <a:bodyPr/>
+          <a:p/>
+        </p:txBody>
       </p:sp>
       <p:sp>
         <p:nvSpPr>
@@ -11696,6 +12794,10 @@
           </a:solidFill>
           <a:ln/>
         </p:spPr>
+        <p:txBody>
+          <a:bodyPr/>
+          <a:p/>
+        </p:txBody>
       </p:sp>
       <p:sp>
         <p:nvSpPr>
@@ -11843,6 +12945,10 @@
             </a:outerShdw>
           </a:effectLst>
         </p:spPr>
+        <p:txBody>
+          <a:bodyPr/>
+          <a:p/>
+        </p:txBody>
       </p:sp>
       <p:sp>
         <p:nvSpPr>
@@ -11863,6 +12969,10 @@
           </a:solidFill>
           <a:ln/>
         </p:spPr>
+        <p:txBody>
+          <a:bodyPr/>
+          <a:p/>
+        </p:txBody>
       </p:sp>
       <p:sp>
         <p:nvSpPr>
